--- a/pptx-creation-plugin/examples/seminar-kanrikaikei/out/deck.pptx
+++ b/pptx-creation-plugin/examples/seminar-kanrikaikei/out/deck.pptx
@@ -146,7 +146,7 @@
           </c:spPr>
           <c:invertIfNegative val="0"/>
           <c:dLbls>
-            <c:numFmt formatCode="#,##0" sourceLinked="0"/>
+            <c:numFmt formatCode="#,##0;▲#,##0" sourceLinked="0"/>
             <c:txPr>
               <a:bodyPr/>
               <a:lstStyle/>
@@ -156,7 +156,7 @@
                     <a:solidFill>
                       <a:srgbClr val="1B2735"/>
                     </a:solidFill>
-                    <a:latin typeface="Meiryo"/>
+                    <a:latin typeface="Yu Gothic Medium"/>
                   </a:defRPr>
                 </a:pPr>
               </a:p>
@@ -226,7 +226,7 @@
           </c:val>
         </c:ser>
         <c:dLbls>
-          <c:numFmt formatCode="#,##0" sourceLinked="0"/>
+          <c:numFmt formatCode="#,##0;▲#,##0" sourceLinked="0"/>
           <c:txPr>
             <a:bodyPr/>
             <a:lstStyle/>
@@ -236,7 +236,7 @@
                   <a:solidFill>
                     <a:srgbClr val="1B2735"/>
                   </a:solidFill>
-                  <a:latin typeface="Meiryo"/>
+                  <a:latin typeface="Yu Gothic Medium"/>
                 </a:defRPr>
               </a:pPr>
             </a:p>
@@ -282,7 +282,7 @@
                 <a:solidFill>
                   <a:srgbClr val="566373"/>
                 </a:solidFill>
-                <a:latin typeface="Meiryo"/>
+                <a:latin typeface="Yu Gothic Medium"/>
               </a:defRPr>
             </a:pPr>
             <a:endParaRPr lang="en-US"/>
@@ -1595,7 +1595,7 @@
         </p:nvSpPr>
         <p:spPr>
           <a:xfrm>
-            <a:off x="640080" y="1467612"/>
+            <a:off x="685800" y="1467612"/>
             <a:ext cx="118872" cy="118872"/>
           </a:xfrm>
           <a:prstGeom prst="ellipse">
@@ -1615,7 +1615,7 @@
         </p:nvSpPr>
         <p:spPr>
           <a:xfrm>
-            <a:off x="877824" y="1417320"/>
+            <a:off x="923544" y="1417320"/>
             <a:ext cx="7315200" cy="274320"/>
           </a:xfrm>
           <a:prstGeom prst="rect">
@@ -1632,17 +1632,17 @@
               <a:buNone/>
             </a:pPr>
             <a:r>
-              <a:rPr lang="en-US" sz="1250" b="1" spc="100" kern="0" dirty="0">
+              <a:rPr lang="en-US" sz="1200" b="1" spc="150" kern="0" dirty="0">
                 <a:solidFill>
                   <a:srgbClr val="5FA8AE"/>
                 </a:solidFill>
-                <a:latin typeface="Meiryo" pitchFamily="34" charset="0"/>
-                <a:ea typeface="Meiryo" pitchFamily="34" charset="-122"/>
-                <a:cs typeface="Meiryo" pitchFamily="34" charset="-120"/>
+                <a:latin typeface="Yu Gothic" pitchFamily="34" charset="0"/>
+                <a:ea typeface="Yu Gothic" pitchFamily="34" charset="-122"/>
+                <a:cs typeface="Yu Gothic" pitchFamily="34" charset="-120"/>
               </a:rPr>
               <a:t>経営者向けセミナー（60分）</a:t>
             </a:r>
-            <a:endParaRPr lang="en-US" sz="1250" dirty="0"/>
+            <a:endParaRPr lang="en-US" sz="1200" dirty="0"/>
           </a:p>
         </p:txBody>
       </p:sp>
@@ -1654,8 +1654,8 @@
         </p:nvSpPr>
         <p:spPr>
           <a:xfrm>
-            <a:off x="640080" y="2057400"/>
-            <a:ext cx="9144000" cy="1371600"/>
+            <a:off x="685800" y="2011680"/>
+            <a:ext cx="9144000" cy="1408176"/>
           </a:xfrm>
           <a:prstGeom prst="rect">
             <a:avLst/>
@@ -1669,42 +1669,42 @@
           <a:p>
             <a:pPr algn="l" indent="0" marL="0">
               <a:lnSpc>
-                <a:spcPct val="112000"/>
+                <a:spcPct val="108000"/>
               </a:lnSpc>
               <a:buNone/>
             </a:pPr>
             <a:r>
-              <a:rPr lang="en-US" sz="4000" b="1" dirty="0">
+              <a:rPr lang="en-US" sz="4400" b="1" spc="-20" kern="0" dirty="0">
                 <a:solidFill>
                   <a:srgbClr val="FFFFFF"/>
                 </a:solidFill>
-                <a:latin typeface="Meiryo" pitchFamily="34" charset="0"/>
-                <a:ea typeface="Meiryo" pitchFamily="34" charset="-122"/>
-                <a:cs typeface="Meiryo" pitchFamily="34" charset="-120"/>
+                <a:latin typeface="Yu Gothic" pitchFamily="34" charset="0"/>
+                <a:ea typeface="Yu Gothic" pitchFamily="34" charset="-122"/>
+                <a:cs typeface="Yu Gothic" pitchFamily="34" charset="-120"/>
               </a:rPr>
               <a:t>数字で経営を変える</a:t>
             </a:r>
-            <a:endParaRPr lang="en-US" sz="4000" dirty="0"/>
+            <a:endParaRPr lang="en-US" sz="4400" dirty="0"/>
           </a:p>
           <a:p>
             <a:pPr algn="l" indent="0" marL="0">
               <a:lnSpc>
-                <a:spcPct val="112000"/>
+                <a:spcPct val="108000"/>
               </a:lnSpc>
               <a:buNone/>
             </a:pPr>
             <a:r>
-              <a:rPr lang="en-US" sz="4000" b="1" dirty="0">
+              <a:rPr lang="en-US" sz="4400" b="1" spc="-20" kern="0" dirty="0">
                 <a:solidFill>
                   <a:srgbClr val="FFFFFF"/>
                 </a:solidFill>
-                <a:latin typeface="Meiryo" pitchFamily="34" charset="0"/>
-                <a:ea typeface="Meiryo" pitchFamily="34" charset="-122"/>
-                <a:cs typeface="Meiryo" pitchFamily="34" charset="-120"/>
+                <a:latin typeface="Yu Gothic" pitchFamily="34" charset="0"/>
+                <a:ea typeface="Yu Gothic" pitchFamily="34" charset="-122"/>
+                <a:cs typeface="Yu Gothic" pitchFamily="34" charset="-120"/>
               </a:rPr>
               <a:t>管理会計 入門</a:t>
             </a:r>
-            <a:endParaRPr lang="en-US" sz="4000" dirty="0"/>
+            <a:endParaRPr lang="en-US" sz="4400" dirty="0"/>
           </a:p>
         </p:txBody>
       </p:sp>
@@ -1716,8 +1716,8 @@
         </p:nvSpPr>
         <p:spPr>
           <a:xfrm>
-            <a:off x="640080" y="4160520"/>
-            <a:ext cx="8686800" cy="457200"/>
+            <a:off x="685800" y="4297680"/>
+            <a:ext cx="8686800" cy="822960"/>
           </a:xfrm>
           <a:prstGeom prst="rect">
             <a:avLst/>
@@ -1730,6 +1730,9 @@
           <a:lstStyle/>
           <a:p>
             <a:pPr algn="l" indent="0" marL="0">
+              <a:lnSpc>
+                <a:spcPct val="150000"/>
+              </a:lnSpc>
               <a:buNone/>
             </a:pPr>
             <a:r>
@@ -1737,9 +1740,9 @@
                 <a:solidFill>
                   <a:srgbClr val="AAB8C7"/>
                 </a:solidFill>
-                <a:latin typeface="Meiryo" pitchFamily="34" charset="0"/>
-                <a:ea typeface="Meiryo" pitchFamily="34" charset="-122"/>
-                <a:cs typeface="Meiryo" pitchFamily="34" charset="-120"/>
+                <a:latin typeface="Yu Gothic Medium" pitchFamily="34" charset="0"/>
+                <a:ea typeface="Yu Gothic Medium" pitchFamily="34" charset="-122"/>
+                <a:cs typeface="Yu Gothic Medium" pitchFamily="34" charset="-120"/>
               </a:rPr>
               <a:t>「どんぶり経営」から、根拠ある意思決定へ</a:t>
             </a:r>
@@ -1755,7 +1758,7 @@
         </p:nvSpPr>
         <p:spPr>
           <a:xfrm>
-            <a:off x="640080" y="6080760"/>
+            <a:off x="685800" y="6080760"/>
             <a:ext cx="8229600" cy="320040"/>
           </a:xfrm>
           <a:prstGeom prst="rect">
@@ -1776,9 +1779,9 @@
                 <a:solidFill>
                   <a:srgbClr val="AAB8C7"/>
                 </a:solidFill>
-                <a:latin typeface="Meiryo" pitchFamily="34" charset="0"/>
-                <a:ea typeface="Meiryo" pitchFamily="34" charset="-122"/>
-                <a:cs typeface="Meiryo" pitchFamily="34" charset="-120"/>
+                <a:latin typeface="Yu Gothic" pitchFamily="34" charset="0"/>
+                <a:ea typeface="Yu Gothic" pitchFamily="34" charset="-122"/>
+                <a:cs typeface="Yu Gothic" pitchFamily="34" charset="-120"/>
               </a:rPr>
               <a:t>大吉会計　｜　2026年7月</a:t>
             </a:r>
@@ -1826,7 +1829,7 @@
         </p:nvSpPr>
         <p:spPr>
           <a:xfrm>
-            <a:off x="640080" y="690372"/>
+            <a:off x="685800" y="736092"/>
             <a:ext cx="118872" cy="118872"/>
           </a:xfrm>
           <a:prstGeom prst="ellipse">
@@ -1846,7 +1849,7 @@
         </p:nvSpPr>
         <p:spPr>
           <a:xfrm>
-            <a:off x="877824" y="640080"/>
+            <a:off x="923544" y="685800"/>
             <a:ext cx="7315200" cy="274320"/>
           </a:xfrm>
           <a:prstGeom prst="rect">
@@ -1863,17 +1866,17 @@
               <a:buNone/>
             </a:pPr>
             <a:r>
-              <a:rPr lang="en-US" sz="1250" b="1" spc="100" kern="0" dirty="0">
+              <a:rPr lang="en-US" sz="1200" b="1" spc="150" kern="0" dirty="0">
                 <a:solidFill>
                   <a:srgbClr val="0E7C86"/>
                 </a:solidFill>
-                <a:latin typeface="Meiryo" pitchFamily="34" charset="0"/>
-                <a:ea typeface="Meiryo" pitchFamily="34" charset="-122"/>
-                <a:cs typeface="Meiryo" pitchFamily="34" charset="-120"/>
+                <a:latin typeface="Yu Gothic" pitchFamily="34" charset="0"/>
+                <a:ea typeface="Yu Gothic" pitchFamily="34" charset="-122"/>
+                <a:cs typeface="Yu Gothic" pitchFamily="34" charset="-120"/>
               </a:rPr>
               <a:t>本セミナーのゴール</a:t>
             </a:r>
-            <a:endParaRPr lang="en-US" sz="1250" dirty="0"/>
+            <a:endParaRPr lang="en-US" sz="1200" dirty="0"/>
           </a:p>
         </p:txBody>
       </p:sp>
@@ -1885,7 +1888,7 @@
         </p:nvSpPr>
         <p:spPr>
           <a:xfrm>
-            <a:off x="914400" y="1783080"/>
+            <a:off x="914400" y="1828800"/>
             <a:ext cx="10362895" cy="1554480"/>
           </a:xfrm>
           <a:prstGeom prst="rect">
@@ -1900,18 +1903,18 @@
           <a:p>
             <a:pPr algn="ctr" indent="0" marL="0">
               <a:lnSpc>
-                <a:spcPct val="116000"/>
+                <a:spcPct val="118000"/>
               </a:lnSpc>
               <a:buNone/>
             </a:pPr>
             <a:r>
-              <a:rPr lang="en-US" sz="3200" b="1" dirty="0">
+              <a:rPr lang="en-US" sz="3200" b="1" spc="-20" kern="0" dirty="0">
                 <a:solidFill>
                   <a:srgbClr val="1B2735"/>
                 </a:solidFill>
-                <a:latin typeface="Meiryo" pitchFamily="34" charset="0"/>
-                <a:ea typeface="Meiryo" pitchFamily="34" charset="-122"/>
-                <a:cs typeface="Meiryo" pitchFamily="34" charset="-120"/>
+                <a:latin typeface="Yu Gothic" pitchFamily="34" charset="0"/>
+                <a:ea typeface="Yu Gothic" pitchFamily="34" charset="-122"/>
+                <a:cs typeface="Yu Gothic" pitchFamily="34" charset="-120"/>
               </a:rPr>
               <a:t>決算書が出てから動くのでは、</a:t>
             </a:r>
@@ -1920,18 +1923,18 @@
           <a:p>
             <a:pPr algn="ctr" indent="0" marL="0">
               <a:lnSpc>
-                <a:spcPct val="116000"/>
+                <a:spcPct val="118000"/>
               </a:lnSpc>
               <a:buNone/>
             </a:pPr>
             <a:r>
-              <a:rPr lang="en-US" sz="3200" b="1" dirty="0">
+              <a:rPr lang="en-US" sz="3200" b="1" spc="-20" kern="0" dirty="0">
                 <a:solidFill>
                   <a:srgbClr val="1B2735"/>
                 </a:solidFill>
-                <a:latin typeface="Meiryo" pitchFamily="34" charset="0"/>
-                <a:ea typeface="Meiryo" pitchFamily="34" charset="-122"/>
-                <a:cs typeface="Meiryo" pitchFamily="34" charset="-120"/>
+                <a:latin typeface="Yu Gothic" pitchFamily="34" charset="0"/>
+                <a:ea typeface="Yu Gothic" pitchFamily="34" charset="-122"/>
+                <a:cs typeface="Yu Gothic" pitchFamily="34" charset="-120"/>
               </a:rPr>
               <a:t>半年遅い。</a:t>
             </a:r>
@@ -1964,17 +1967,17 @@
               <a:buNone/>
             </a:pPr>
             <a:r>
-              <a:rPr lang="en-US" sz="6200" b="1" dirty="0">
+              <a:rPr lang="en-US" sz="6400" b="1" dirty="0">
                 <a:solidFill>
                   <a:srgbClr val="0E7C86"/>
                 </a:solidFill>
-                <a:latin typeface="Meiryo" pitchFamily="34" charset="0"/>
-                <a:ea typeface="Meiryo" pitchFamily="34" charset="-122"/>
-                <a:cs typeface="Meiryo" pitchFamily="34" charset="-120"/>
+                <a:latin typeface="Yu Gothic" pitchFamily="34" charset="0"/>
+                <a:ea typeface="Yu Gothic" pitchFamily="34" charset="-122"/>
+                <a:cs typeface="Yu Gothic" pitchFamily="34" charset="-120"/>
               </a:rPr>
               <a:t>約60%</a:t>
             </a:r>
-            <a:endParaRPr lang="en-US" sz="6200" dirty="0"/>
+            <a:endParaRPr lang="en-US" sz="6400" dirty="0"/>
           </a:p>
         </p:txBody>
       </p:sp>
@@ -1986,7 +1989,7 @@
         </p:nvSpPr>
         <p:spPr>
           <a:xfrm>
-            <a:off x="2377440" y="4754880"/>
+            <a:off x="2377440" y="4800600"/>
             <a:ext cx="7436815" cy="731520"/>
           </a:xfrm>
           <a:prstGeom prst="rect">
@@ -2001,22 +2004,22 @@
           <a:p>
             <a:pPr algn="ctr" indent="0" marL="0">
               <a:lnSpc>
-                <a:spcPct val="125000"/>
+                <a:spcPct val="150000"/>
               </a:lnSpc>
               <a:buNone/>
             </a:pPr>
             <a:r>
-              <a:rPr lang="en-US" sz="1300" dirty="0">
+              <a:rPr lang="en-US" sz="1350" dirty="0">
                 <a:solidFill>
                   <a:srgbClr val="566373"/>
                 </a:solidFill>
-                <a:latin typeface="Meiryo" pitchFamily="34" charset="0"/>
-                <a:ea typeface="Meiryo" pitchFamily="34" charset="-122"/>
-                <a:cs typeface="Meiryo" pitchFamily="34" charset="-120"/>
+                <a:latin typeface="Yu Gothic" pitchFamily="34" charset="0"/>
+                <a:ea typeface="Yu Gothic" pitchFamily="34" charset="-122"/>
+                <a:cs typeface="Yu Gothic" pitchFamily="34" charset="-120"/>
               </a:rPr>
               <a:t>自社の利益構造を「数字で説明できる」経営者は、決して多くありません（イメージ）</a:t>
             </a:r>
-            <a:endParaRPr lang="en-US" sz="1300" dirty="0"/>
+            <a:endParaRPr lang="en-US" sz="1350" dirty="0"/>
           </a:p>
         </p:txBody>
       </p:sp>
@@ -2028,7 +2031,7 @@
         </p:nvSpPr>
         <p:spPr>
           <a:xfrm>
-            <a:off x="640080" y="6473952"/>
+            <a:off x="685800" y="6473952"/>
             <a:ext cx="2743200" cy="274320"/>
           </a:xfrm>
           <a:prstGeom prst="rect">
@@ -2045,17 +2048,17 @@
               <a:buNone/>
             </a:pPr>
             <a:r>
-              <a:rPr lang="en-US" sz="1100" dirty="0">
+              <a:rPr lang="en-US" sz="1200" dirty="0">
                 <a:solidFill>
                   <a:srgbClr val="8A98A6"/>
                 </a:solidFill>
-                <a:latin typeface="Meiryo" pitchFamily="34" charset="0"/>
-                <a:ea typeface="Meiryo" pitchFamily="34" charset="-122"/>
-                <a:cs typeface="Meiryo" pitchFamily="34" charset="-120"/>
+                <a:latin typeface="Yu Gothic" pitchFamily="34" charset="0"/>
+                <a:ea typeface="Yu Gothic" pitchFamily="34" charset="-122"/>
+                <a:cs typeface="Yu Gothic" pitchFamily="34" charset="-120"/>
               </a:rPr>
               <a:t>大吉会計</a:t>
             </a:r>
-            <a:endParaRPr lang="en-US" sz="1100" dirty="0"/>
+            <a:endParaRPr lang="en-US" sz="1200" dirty="0"/>
           </a:p>
         </p:txBody>
       </p:sp>
@@ -2067,7 +2070,7 @@
         </p:nvSpPr>
         <p:spPr>
           <a:xfrm>
-            <a:off x="10637215" y="6473952"/>
+            <a:off x="10591495" y="6473952"/>
             <a:ext cx="914400" cy="274320"/>
           </a:xfrm>
           <a:prstGeom prst="rect">
@@ -2084,17 +2087,17 @@
               <a:buNone/>
             </a:pPr>
             <a:r>
-              <a:rPr lang="en-US" sz="1100" dirty="0">
+              <a:rPr lang="en-US" sz="1200" dirty="0">
                 <a:solidFill>
                   <a:srgbClr val="8A98A6"/>
                 </a:solidFill>
-                <a:latin typeface="Meiryo" pitchFamily="34" charset="0"/>
-                <a:ea typeface="Meiryo" pitchFamily="34" charset="-122"/>
-                <a:cs typeface="Meiryo" pitchFamily="34" charset="-120"/>
+                <a:latin typeface="Yu Gothic" pitchFamily="34" charset="0"/>
+                <a:ea typeface="Yu Gothic" pitchFamily="34" charset="-122"/>
+                <a:cs typeface="Yu Gothic" pitchFamily="34" charset="-120"/>
               </a:rPr>
               <a:t>2</a:t>
             </a:r>
-            <a:endParaRPr lang="en-US" sz="1100" dirty="0"/>
+            <a:endParaRPr lang="en-US" sz="1200" dirty="0"/>
           </a:p>
         </p:txBody>
       </p:sp>
@@ -2138,7 +2141,7 @@
         </p:nvSpPr>
         <p:spPr>
           <a:xfrm>
-            <a:off x="640080" y="690372"/>
+            <a:off x="685800" y="736092"/>
             <a:ext cx="118872" cy="118872"/>
           </a:xfrm>
           <a:prstGeom prst="ellipse">
@@ -2158,7 +2161,7 @@
         </p:nvSpPr>
         <p:spPr>
           <a:xfrm>
-            <a:off x="877824" y="640080"/>
+            <a:off x="923544" y="685800"/>
             <a:ext cx="7315200" cy="274320"/>
           </a:xfrm>
           <a:prstGeom prst="rect">
@@ -2175,17 +2178,17 @@
               <a:buNone/>
             </a:pPr>
             <a:r>
-              <a:rPr lang="en-US" sz="1250" b="1" spc="100" kern="0" dirty="0">
+              <a:rPr lang="en-US" sz="1200" b="1" spc="150" kern="0" dirty="0">
                 <a:solidFill>
                   <a:srgbClr val="0E7C86"/>
                 </a:solidFill>
-                <a:latin typeface="Meiryo" pitchFamily="34" charset="0"/>
-                <a:ea typeface="Meiryo" pitchFamily="34" charset="-122"/>
-                <a:cs typeface="Meiryo" pitchFamily="34" charset="-120"/>
+                <a:latin typeface="Yu Gothic" pitchFamily="34" charset="0"/>
+                <a:ea typeface="Yu Gothic" pitchFamily="34" charset="-122"/>
+                <a:cs typeface="Yu Gothic" pitchFamily="34" charset="-120"/>
               </a:rPr>
               <a:t>管理会計でわかること</a:t>
             </a:r>
-            <a:endParaRPr lang="en-US" sz="1250" dirty="0"/>
+            <a:endParaRPr lang="en-US" sz="1200" dirty="0"/>
           </a:p>
         </p:txBody>
       </p:sp>
@@ -2197,8 +2200,8 @@
         </p:nvSpPr>
         <p:spPr>
           <a:xfrm>
-            <a:off x="640080" y="1051560"/>
-            <a:ext cx="6400800" cy="868680"/>
+            <a:off x="685800" y="1051560"/>
+            <a:ext cx="6400800" cy="841248"/>
           </a:xfrm>
           <a:prstGeom prst="rect">
             <a:avLst/>
@@ -2212,22 +2215,22 @@
           <a:p>
             <a:pPr algn="l" indent="0" marL="0">
               <a:lnSpc>
-                <a:spcPct val="112000"/>
+                <a:spcPct val="108000"/>
               </a:lnSpc>
               <a:buNone/>
             </a:pPr>
             <a:r>
-              <a:rPr lang="en-US" sz="2800" b="1" dirty="0">
+              <a:rPr lang="en-US" sz="3000" b="1" spc="-20" kern="0" dirty="0">
                 <a:solidFill>
                   <a:srgbClr val="1B2735"/>
                 </a:solidFill>
-                <a:latin typeface="Meiryo" pitchFamily="34" charset="0"/>
-                <a:ea typeface="Meiryo" pitchFamily="34" charset="-122"/>
-                <a:cs typeface="Meiryo" pitchFamily="34" charset="-120"/>
+                <a:latin typeface="Yu Gothic" pitchFamily="34" charset="0"/>
+                <a:ea typeface="Yu Gothic" pitchFamily="34" charset="-122"/>
+                <a:cs typeface="Yu Gothic" pitchFamily="34" charset="-120"/>
               </a:rPr>
               <a:t>管理会計が照らす、3つの視点</a:t>
             </a:r>
-            <a:endParaRPr lang="en-US" sz="2800" dirty="0"/>
+            <a:endParaRPr lang="en-US" sz="3000" dirty="0"/>
           </a:p>
         </p:txBody>
       </p:sp>
@@ -2239,8 +2242,8 @@
         </p:nvSpPr>
         <p:spPr>
           <a:xfrm>
-            <a:off x="640080" y="2286000"/>
-            <a:ext cx="4754880" cy="3291840"/>
+            <a:off x="685800" y="2331720"/>
+            <a:ext cx="4572000" cy="3291840"/>
           </a:xfrm>
           <a:prstGeom prst="rect">
             <a:avLst/>
@@ -2254,7 +2257,7 @@
           <a:p>
             <a:pPr algn="l" indent="0" marL="0">
               <a:lnSpc>
-                <a:spcPct val="145000"/>
+                <a:spcPct val="160000"/>
               </a:lnSpc>
               <a:buNone/>
             </a:pPr>
@@ -2263,9 +2266,9 @@
                 <a:solidFill>
                   <a:srgbClr val="566373"/>
                 </a:solidFill>
-                <a:latin typeface="Meiryo" pitchFamily="34" charset="0"/>
-                <a:ea typeface="Meiryo" pitchFamily="34" charset="-122"/>
-                <a:cs typeface="Meiryo" pitchFamily="34" charset="-120"/>
+                <a:latin typeface="Yu Gothic Medium" pitchFamily="34" charset="0"/>
+                <a:ea typeface="Yu Gothic Medium" pitchFamily="34" charset="-122"/>
+                <a:cs typeface="Yu Gothic Medium" pitchFamily="34" charset="-120"/>
               </a:rPr>
               <a:t>財務会計が「過去の成績表」だとすれば、管理会計は「これからの打ち手」を考えるための道具です。日々の数字を分解して見ることで、利益の源泉と改善の余地が見えてきます。</a:t>
             </a:r>
@@ -2281,7 +2284,7 @@
         </p:nvSpPr>
         <p:spPr>
           <a:xfrm>
-            <a:off x="5897880" y="2240280"/>
+            <a:off x="5897880" y="2286000"/>
             <a:ext cx="420624" cy="420624"/>
           </a:xfrm>
           <a:prstGeom prst="ellipse">
@@ -2301,7 +2304,7 @@
         </p:nvSpPr>
         <p:spPr>
           <a:xfrm>
-            <a:off x="5897880" y="2240280"/>
+            <a:off x="5897880" y="2286000"/>
             <a:ext cx="420624" cy="420624"/>
           </a:xfrm>
           <a:prstGeom prst="rect">
@@ -2322,9 +2325,9 @@
                 <a:solidFill>
                   <a:srgbClr val="FFFFFF"/>
                 </a:solidFill>
-                <a:latin typeface="Meiryo" pitchFamily="34" charset="0"/>
-                <a:ea typeface="Meiryo" pitchFamily="34" charset="-122"/>
-                <a:cs typeface="Meiryo" pitchFamily="34" charset="-120"/>
+                <a:latin typeface="Yu Gothic" pitchFamily="34" charset="0"/>
+                <a:ea typeface="Yu Gothic" pitchFamily="34" charset="-122"/>
+                <a:cs typeface="Yu Gothic" pitchFamily="34" charset="-120"/>
               </a:rPr>
               <a:t>1</a:t>
             </a:r>
@@ -2340,8 +2343,8 @@
         </p:nvSpPr>
         <p:spPr>
           <a:xfrm>
-            <a:off x="6501384" y="2194560"/>
-            <a:ext cx="5050231" cy="365760"/>
+            <a:off x="6501384" y="2240280"/>
+            <a:ext cx="5004511" cy="365760"/>
           </a:xfrm>
           <a:prstGeom prst="rect">
             <a:avLst/>
@@ -2357,17 +2360,17 @@
               <a:buNone/>
             </a:pPr>
             <a:r>
-              <a:rPr lang="en-US" sz="1800" b="1" dirty="0">
+              <a:rPr lang="en-US" sz="1900" b="1" dirty="0">
                 <a:solidFill>
                   <a:srgbClr val="1B2735"/>
                 </a:solidFill>
-                <a:latin typeface="Meiryo" pitchFamily="34" charset="0"/>
-                <a:ea typeface="Meiryo" pitchFamily="34" charset="-122"/>
-                <a:cs typeface="Meiryo" pitchFamily="34" charset="-120"/>
+                <a:latin typeface="Yu Gothic" pitchFamily="34" charset="0"/>
+                <a:ea typeface="Yu Gothic" pitchFamily="34" charset="-122"/>
+                <a:cs typeface="Yu Gothic" pitchFamily="34" charset="-120"/>
               </a:rPr>
               <a:t>利益構造</a:t>
             </a:r>
-            <a:endParaRPr lang="en-US" sz="1800" dirty="0"/>
+            <a:endParaRPr lang="en-US" sz="1900" dirty="0"/>
           </a:p>
         </p:txBody>
       </p:sp>
@@ -2379,8 +2382,8 @@
         </p:nvSpPr>
         <p:spPr>
           <a:xfrm>
-            <a:off x="6501384" y="2624328"/>
-            <a:ext cx="5050231" cy="640080"/>
+            <a:off x="6501384" y="2688336"/>
+            <a:ext cx="5004511" cy="640080"/>
           </a:xfrm>
           <a:prstGeom prst="rect">
             <a:avLst/>
@@ -2394,22 +2397,22 @@
           <a:p>
             <a:pPr algn="l" indent="0" marL="0">
               <a:lnSpc>
-                <a:spcPct val="130000"/>
+                <a:spcPct val="140000"/>
               </a:lnSpc>
               <a:buNone/>
             </a:pPr>
             <a:r>
-              <a:rPr lang="en-US" sz="1300" dirty="0">
+              <a:rPr lang="en-US" sz="1350" dirty="0">
                 <a:solidFill>
                   <a:srgbClr val="566373"/>
                 </a:solidFill>
-                <a:latin typeface="Meiryo" pitchFamily="34" charset="0"/>
-                <a:ea typeface="Meiryo" pitchFamily="34" charset="-122"/>
-                <a:cs typeface="Meiryo" pitchFamily="34" charset="-120"/>
+                <a:latin typeface="Yu Gothic Medium" pitchFamily="34" charset="0"/>
+                <a:ea typeface="Yu Gothic Medium" pitchFamily="34" charset="-122"/>
+                <a:cs typeface="Yu Gothic Medium" pitchFamily="34" charset="-120"/>
               </a:rPr>
               <a:t>どの商品・顧客が利益を生んでいるかを把握する</a:t>
             </a:r>
-            <a:endParaRPr lang="en-US" sz="1300" dirty="0"/>
+            <a:endParaRPr lang="en-US" sz="1350" dirty="0"/>
           </a:p>
         </p:txBody>
       </p:sp>
@@ -2421,7 +2424,7 @@
         </p:nvSpPr>
         <p:spPr>
           <a:xfrm>
-            <a:off x="5897880" y="3538728"/>
+            <a:off x="5897880" y="3621024"/>
             <a:ext cx="420624" cy="420624"/>
           </a:xfrm>
           <a:prstGeom prst="ellipse">
@@ -2441,7 +2444,7 @@
         </p:nvSpPr>
         <p:spPr>
           <a:xfrm>
-            <a:off x="5897880" y="3538728"/>
+            <a:off x="5897880" y="3621024"/>
             <a:ext cx="420624" cy="420624"/>
           </a:xfrm>
           <a:prstGeom prst="rect">
@@ -2462,9 +2465,9 @@
                 <a:solidFill>
                   <a:srgbClr val="FFFFFF"/>
                 </a:solidFill>
-                <a:latin typeface="Meiryo" pitchFamily="34" charset="0"/>
-                <a:ea typeface="Meiryo" pitchFamily="34" charset="-122"/>
-                <a:cs typeface="Meiryo" pitchFamily="34" charset="-120"/>
+                <a:latin typeface="Yu Gothic" pitchFamily="34" charset="0"/>
+                <a:ea typeface="Yu Gothic" pitchFamily="34" charset="-122"/>
+                <a:cs typeface="Yu Gothic" pitchFamily="34" charset="-120"/>
               </a:rPr>
               <a:t>2</a:t>
             </a:r>
@@ -2480,8 +2483,8 @@
         </p:nvSpPr>
         <p:spPr>
           <a:xfrm>
-            <a:off x="6501384" y="3493008"/>
-            <a:ext cx="5050231" cy="365760"/>
+            <a:off x="6501384" y="3575304"/>
+            <a:ext cx="5004511" cy="365760"/>
           </a:xfrm>
           <a:prstGeom prst="rect">
             <a:avLst/>
@@ -2497,17 +2500,17 @@
               <a:buNone/>
             </a:pPr>
             <a:r>
-              <a:rPr lang="en-US" sz="1800" b="1" dirty="0">
+              <a:rPr lang="en-US" sz="1900" b="1" dirty="0">
                 <a:solidFill>
                   <a:srgbClr val="1B2735"/>
                 </a:solidFill>
-                <a:latin typeface="Meiryo" pitchFamily="34" charset="0"/>
-                <a:ea typeface="Meiryo" pitchFamily="34" charset="-122"/>
-                <a:cs typeface="Meiryo" pitchFamily="34" charset="-120"/>
+                <a:latin typeface="Yu Gothic" pitchFamily="34" charset="0"/>
+                <a:ea typeface="Yu Gothic" pitchFamily="34" charset="-122"/>
+                <a:cs typeface="Yu Gothic" pitchFamily="34" charset="-120"/>
               </a:rPr>
               <a:t>資金繰り</a:t>
             </a:r>
-            <a:endParaRPr lang="en-US" sz="1800" dirty="0"/>
+            <a:endParaRPr lang="en-US" sz="1900" dirty="0"/>
           </a:p>
         </p:txBody>
       </p:sp>
@@ -2519,8 +2522,8 @@
         </p:nvSpPr>
         <p:spPr>
           <a:xfrm>
-            <a:off x="6501384" y="3922776"/>
-            <a:ext cx="5050231" cy="640080"/>
+            <a:off x="6501384" y="4023360"/>
+            <a:ext cx="5004511" cy="640080"/>
           </a:xfrm>
           <a:prstGeom prst="rect">
             <a:avLst/>
@@ -2534,22 +2537,22 @@
           <a:p>
             <a:pPr algn="l" indent="0" marL="0">
               <a:lnSpc>
-                <a:spcPct val="130000"/>
+                <a:spcPct val="140000"/>
               </a:lnSpc>
               <a:buNone/>
             </a:pPr>
             <a:r>
-              <a:rPr lang="en-US" sz="1300" dirty="0">
+              <a:rPr lang="en-US" sz="1350" dirty="0">
                 <a:solidFill>
                   <a:srgbClr val="566373"/>
                 </a:solidFill>
-                <a:latin typeface="Meiryo" pitchFamily="34" charset="0"/>
-                <a:ea typeface="Meiryo" pitchFamily="34" charset="-122"/>
-                <a:cs typeface="Meiryo" pitchFamily="34" charset="-120"/>
+                <a:latin typeface="Yu Gothic Medium" pitchFamily="34" charset="0"/>
+                <a:ea typeface="Yu Gothic Medium" pitchFamily="34" charset="-122"/>
+                <a:cs typeface="Yu Gothic Medium" pitchFamily="34" charset="-120"/>
               </a:rPr>
               <a:t>将来の資金の動きを先読みし、不足を未然に防ぐ</a:t>
             </a:r>
-            <a:endParaRPr lang="en-US" sz="1300" dirty="0"/>
+            <a:endParaRPr lang="en-US" sz="1350" dirty="0"/>
           </a:p>
         </p:txBody>
       </p:sp>
@@ -2561,7 +2564,7 @@
         </p:nvSpPr>
         <p:spPr>
           <a:xfrm>
-            <a:off x="5897880" y="4837176"/>
+            <a:off x="5897880" y="4956048"/>
             <a:ext cx="420624" cy="420624"/>
           </a:xfrm>
           <a:prstGeom prst="ellipse">
@@ -2581,7 +2584,7 @@
         </p:nvSpPr>
         <p:spPr>
           <a:xfrm>
-            <a:off x="5897880" y="4837176"/>
+            <a:off x="5897880" y="4956048"/>
             <a:ext cx="420624" cy="420624"/>
           </a:xfrm>
           <a:prstGeom prst="rect">
@@ -2602,9 +2605,9 @@
                 <a:solidFill>
                   <a:srgbClr val="FFFFFF"/>
                 </a:solidFill>
-                <a:latin typeface="Meiryo" pitchFamily="34" charset="0"/>
-                <a:ea typeface="Meiryo" pitchFamily="34" charset="-122"/>
-                <a:cs typeface="Meiryo" pitchFamily="34" charset="-120"/>
+                <a:latin typeface="Yu Gothic" pitchFamily="34" charset="0"/>
+                <a:ea typeface="Yu Gothic" pitchFamily="34" charset="-122"/>
+                <a:cs typeface="Yu Gothic" pitchFamily="34" charset="-120"/>
               </a:rPr>
               <a:t>3</a:t>
             </a:r>
@@ -2620,8 +2623,8 @@
         </p:nvSpPr>
         <p:spPr>
           <a:xfrm>
-            <a:off x="6501384" y="4791456"/>
-            <a:ext cx="5050231" cy="365760"/>
+            <a:off x="6501384" y="4910328"/>
+            <a:ext cx="5004511" cy="365760"/>
           </a:xfrm>
           <a:prstGeom prst="rect">
             <a:avLst/>
@@ -2637,17 +2640,17 @@
               <a:buNone/>
             </a:pPr>
             <a:r>
-              <a:rPr lang="en-US" sz="1800" b="1" dirty="0">
+              <a:rPr lang="en-US" sz="1900" b="1" dirty="0">
                 <a:solidFill>
                   <a:srgbClr val="1B2735"/>
                 </a:solidFill>
-                <a:latin typeface="Meiryo" pitchFamily="34" charset="0"/>
-                <a:ea typeface="Meiryo" pitchFamily="34" charset="-122"/>
-                <a:cs typeface="Meiryo" pitchFamily="34" charset="-120"/>
+                <a:latin typeface="Yu Gothic" pitchFamily="34" charset="0"/>
+                <a:ea typeface="Yu Gothic" pitchFamily="34" charset="-122"/>
+                <a:cs typeface="Yu Gothic" pitchFamily="34" charset="-120"/>
               </a:rPr>
               <a:t>投資判断</a:t>
             </a:r>
-            <a:endParaRPr lang="en-US" sz="1800" dirty="0"/>
+            <a:endParaRPr lang="en-US" sz="1900" dirty="0"/>
           </a:p>
         </p:txBody>
       </p:sp>
@@ -2659,8 +2662,8 @@
         </p:nvSpPr>
         <p:spPr>
           <a:xfrm>
-            <a:off x="6501384" y="5221224"/>
-            <a:ext cx="5050231" cy="640080"/>
+            <a:off x="6501384" y="5358384"/>
+            <a:ext cx="5004511" cy="640080"/>
           </a:xfrm>
           <a:prstGeom prst="rect">
             <a:avLst/>
@@ -2674,22 +2677,22 @@
           <a:p>
             <a:pPr algn="l" indent="0" marL="0">
               <a:lnSpc>
-                <a:spcPct val="130000"/>
+                <a:spcPct val="140000"/>
               </a:lnSpc>
               <a:buNone/>
             </a:pPr>
             <a:r>
-              <a:rPr lang="en-US" sz="1300" dirty="0">
+              <a:rPr lang="en-US" sz="1350" dirty="0">
                 <a:solidFill>
                   <a:srgbClr val="566373"/>
                 </a:solidFill>
-                <a:latin typeface="Meiryo" pitchFamily="34" charset="0"/>
-                <a:ea typeface="Meiryo" pitchFamily="34" charset="-122"/>
-                <a:cs typeface="Meiryo" pitchFamily="34" charset="-120"/>
+                <a:latin typeface="Yu Gothic Medium" pitchFamily="34" charset="0"/>
+                <a:ea typeface="Yu Gothic Medium" pitchFamily="34" charset="-122"/>
+                <a:cs typeface="Yu Gothic Medium" pitchFamily="34" charset="-120"/>
               </a:rPr>
               <a:t>設備・人への投資の優先順位を、数字で決める</a:t>
             </a:r>
-            <a:endParaRPr lang="en-US" sz="1300" dirty="0"/>
+            <a:endParaRPr lang="en-US" sz="1350" dirty="0"/>
           </a:p>
         </p:txBody>
       </p:sp>
@@ -2701,7 +2704,7 @@
         </p:nvSpPr>
         <p:spPr>
           <a:xfrm>
-            <a:off x="640080" y="6473952"/>
+            <a:off x="685800" y="6473952"/>
             <a:ext cx="2743200" cy="274320"/>
           </a:xfrm>
           <a:prstGeom prst="rect">
@@ -2718,17 +2721,17 @@
               <a:buNone/>
             </a:pPr>
             <a:r>
-              <a:rPr lang="en-US" sz="1100" dirty="0">
+              <a:rPr lang="en-US" sz="1200" dirty="0">
                 <a:solidFill>
                   <a:srgbClr val="8A98A6"/>
                 </a:solidFill>
-                <a:latin typeface="Meiryo" pitchFamily="34" charset="0"/>
-                <a:ea typeface="Meiryo" pitchFamily="34" charset="-122"/>
-                <a:cs typeface="Meiryo" pitchFamily="34" charset="-120"/>
+                <a:latin typeface="Yu Gothic" pitchFamily="34" charset="0"/>
+                <a:ea typeface="Yu Gothic" pitchFamily="34" charset="-122"/>
+                <a:cs typeface="Yu Gothic" pitchFamily="34" charset="-120"/>
               </a:rPr>
               <a:t>大吉会計</a:t>
             </a:r>
-            <a:endParaRPr lang="en-US" sz="1100" dirty="0"/>
+            <a:endParaRPr lang="en-US" sz="1200" dirty="0"/>
           </a:p>
         </p:txBody>
       </p:sp>
@@ -2740,7 +2743,7 @@
         </p:nvSpPr>
         <p:spPr>
           <a:xfrm>
-            <a:off x="10637215" y="6473952"/>
+            <a:off x="10591495" y="6473952"/>
             <a:ext cx="914400" cy="274320"/>
           </a:xfrm>
           <a:prstGeom prst="rect">
@@ -2757,17 +2760,17 @@
               <a:buNone/>
             </a:pPr>
             <a:r>
-              <a:rPr lang="en-US" sz="1100" dirty="0">
+              <a:rPr lang="en-US" sz="1200" dirty="0">
                 <a:solidFill>
                   <a:srgbClr val="8A98A6"/>
                 </a:solidFill>
-                <a:latin typeface="Meiryo" pitchFamily="34" charset="0"/>
-                <a:ea typeface="Meiryo" pitchFamily="34" charset="-122"/>
-                <a:cs typeface="Meiryo" pitchFamily="34" charset="-120"/>
+                <a:latin typeface="Yu Gothic" pitchFamily="34" charset="0"/>
+                <a:ea typeface="Yu Gothic" pitchFamily="34" charset="-122"/>
+                <a:cs typeface="Yu Gothic" pitchFamily="34" charset="-120"/>
               </a:rPr>
               <a:t>3</a:t>
             </a:r>
-            <a:endParaRPr lang="en-US" sz="1100" dirty="0"/>
+            <a:endParaRPr lang="en-US" sz="1200" dirty="0"/>
           </a:p>
         </p:txBody>
       </p:sp>
@@ -2811,7 +2814,7 @@
         </p:nvSpPr>
         <p:spPr>
           <a:xfrm>
-            <a:off x="640080" y="690372"/>
+            <a:off x="685800" y="736092"/>
             <a:ext cx="118872" cy="118872"/>
           </a:xfrm>
           <a:prstGeom prst="ellipse">
@@ -2831,7 +2834,7 @@
         </p:nvSpPr>
         <p:spPr>
           <a:xfrm>
-            <a:off x="877824" y="640080"/>
+            <a:off x="923544" y="685800"/>
             <a:ext cx="7315200" cy="274320"/>
           </a:xfrm>
           <a:prstGeom prst="rect">
@@ -2848,17 +2851,17 @@
               <a:buNone/>
             </a:pPr>
             <a:r>
-              <a:rPr lang="en-US" sz="1250" b="1" spc="100" kern="0" dirty="0">
+              <a:rPr lang="en-US" sz="1200" b="1" spc="150" kern="0" dirty="0">
                 <a:solidFill>
                   <a:srgbClr val="0E7C86"/>
                 </a:solidFill>
-                <a:latin typeface="Meiryo" pitchFamily="34" charset="0"/>
-                <a:ea typeface="Meiryo" pitchFamily="34" charset="-122"/>
-                <a:cs typeface="Meiryo" pitchFamily="34" charset="-120"/>
+                <a:latin typeface="Yu Gothic" pitchFamily="34" charset="0"/>
+                <a:ea typeface="Yu Gothic" pitchFamily="34" charset="-122"/>
+                <a:cs typeface="Yu Gothic" pitchFamily="34" charset="-120"/>
               </a:rPr>
               <a:t>ちがいを整理する</a:t>
             </a:r>
-            <a:endParaRPr lang="en-US" sz="1250" dirty="0"/>
+            <a:endParaRPr lang="en-US" sz="1200" dirty="0"/>
           </a:p>
         </p:txBody>
       </p:sp>
@@ -2870,8 +2873,8 @@
         </p:nvSpPr>
         <p:spPr>
           <a:xfrm>
-            <a:off x="640080" y="1051560"/>
-            <a:ext cx="10911535" cy="868680"/>
+            <a:off x="685800" y="1051560"/>
+            <a:ext cx="10820095" cy="841248"/>
           </a:xfrm>
           <a:prstGeom prst="rect">
             <a:avLst/>
@@ -2885,22 +2888,22 @@
           <a:p>
             <a:pPr algn="l" indent="0" marL="0">
               <a:lnSpc>
-                <a:spcPct val="112000"/>
+                <a:spcPct val="108000"/>
               </a:lnSpc>
               <a:buNone/>
             </a:pPr>
             <a:r>
-              <a:rPr lang="en-US" sz="2800" b="1" dirty="0">
+              <a:rPr lang="en-US" sz="3000" b="1" spc="-20" kern="0" dirty="0">
                 <a:solidFill>
                   <a:srgbClr val="1B2735"/>
                 </a:solidFill>
-                <a:latin typeface="Meiryo" pitchFamily="34" charset="0"/>
-                <a:ea typeface="Meiryo" pitchFamily="34" charset="-122"/>
-                <a:cs typeface="Meiryo" pitchFamily="34" charset="-120"/>
+                <a:latin typeface="Yu Gothic" pitchFamily="34" charset="0"/>
+                <a:ea typeface="Yu Gothic" pitchFamily="34" charset="-122"/>
+                <a:cs typeface="Yu Gothic" pitchFamily="34" charset="-120"/>
               </a:rPr>
               <a:t>財務会計と管理会計のちがい</a:t>
             </a:r>
-            <a:endParaRPr lang="en-US" sz="2800" dirty="0"/>
+            <a:endParaRPr lang="en-US" sz="3000" dirty="0"/>
           </a:p>
         </p:txBody>
       </p:sp>
@@ -2912,12 +2915,12 @@
         </p:nvSpPr>
         <p:spPr>
           <a:xfrm>
-            <a:off x="640080" y="2240280"/>
-            <a:ext cx="5227168" cy="3703320"/>
+            <a:off x="685800" y="2286000"/>
+            <a:ext cx="5181448" cy="3611880"/>
           </a:xfrm>
           <a:prstGeom prst="roundRect">
             <a:avLst>
-              <a:gd name="adj" fmla="val 2222"/>
+              <a:gd name="adj" fmla="val 2532"/>
             </a:avLst>
           </a:prstGeom>
           <a:solidFill>
@@ -2927,7 +2930,7 @@
           <a:effectLst>
             <a:outerShdw sx="100000" sy="100000" kx="0" ky="0" algn="bl" rotWithShape="0" blurRad="127000" dist="50800" dir="5400000">
               <a:srgbClr val="1B2735">
-                <a:alpha val="12000"/>
+                <a:alpha val="10000"/>
               </a:srgbClr>
             </a:outerShdw>
           </a:effectLst>
@@ -2941,12 +2944,12 @@
         </p:nvSpPr>
         <p:spPr>
           <a:xfrm>
-            <a:off x="6324448" y="2240280"/>
-            <a:ext cx="5227168" cy="3703320"/>
+            <a:off x="6324448" y="2286000"/>
+            <a:ext cx="5181448" cy="3611880"/>
           </a:xfrm>
           <a:prstGeom prst="roundRect">
             <a:avLst>
-              <a:gd name="adj" fmla="val 2222"/>
+              <a:gd name="adj" fmla="val 2532"/>
             </a:avLst>
           </a:prstGeom>
           <a:solidFill>
@@ -2956,7 +2959,7 @@
           <a:effectLst>
             <a:outerShdw sx="100000" sy="100000" kx="0" ky="0" algn="bl" rotWithShape="0" blurRad="127000" dist="50800" dir="5400000">
               <a:srgbClr val="1B2735">
-                <a:alpha val="12000"/>
+                <a:alpha val="10000"/>
               </a:srgbClr>
             </a:outerShdw>
           </a:effectLst>
@@ -2970,8 +2973,8 @@
         </p:nvSpPr>
         <p:spPr>
           <a:xfrm>
-            <a:off x="1051560" y="2606040"/>
-            <a:ext cx="4404208" cy="457200"/>
+            <a:off x="1143000" y="2670048"/>
+            <a:ext cx="4267048" cy="457200"/>
           </a:xfrm>
           <a:prstGeom prst="rect">
             <a:avLst/>
@@ -2987,17 +2990,17 @@
               <a:buNone/>
             </a:pPr>
             <a:r>
-              <a:rPr lang="en-US" sz="2200" b="1" dirty="0">
+              <a:rPr lang="en-US" sz="2300" b="1" dirty="0">
                 <a:solidFill>
                   <a:srgbClr val="1B2735"/>
                 </a:solidFill>
-                <a:latin typeface="Meiryo" pitchFamily="34" charset="0"/>
-                <a:ea typeface="Meiryo" pitchFamily="34" charset="-122"/>
-                <a:cs typeface="Meiryo" pitchFamily="34" charset="-120"/>
+                <a:latin typeface="Yu Gothic" pitchFamily="34" charset="0"/>
+                <a:ea typeface="Yu Gothic" pitchFamily="34" charset="-122"/>
+                <a:cs typeface="Yu Gothic" pitchFamily="34" charset="-120"/>
               </a:rPr>
               <a:t>財務会計</a:t>
             </a:r>
-            <a:endParaRPr lang="en-US" sz="2200" dirty="0"/>
+            <a:endParaRPr lang="en-US" sz="2300" dirty="0"/>
           </a:p>
         </p:txBody>
       </p:sp>
@@ -3009,8 +3012,8 @@
         </p:nvSpPr>
         <p:spPr>
           <a:xfrm>
-            <a:off x="1051560" y="3108960"/>
-            <a:ext cx="4404208" cy="320040"/>
+            <a:off x="1143000" y="3182112"/>
+            <a:ext cx="4267048" cy="320040"/>
           </a:xfrm>
           <a:prstGeom prst="rect">
             <a:avLst/>
@@ -3026,17 +3029,17 @@
               <a:buNone/>
             </a:pPr>
             <a:r>
-              <a:rPr lang="en-US" sz="1300" dirty="0">
+              <a:rPr lang="en-US" sz="1350" dirty="0">
                 <a:solidFill>
                   <a:srgbClr val="566373"/>
                 </a:solidFill>
-                <a:latin typeface="Meiryo" pitchFamily="34" charset="0"/>
-                <a:ea typeface="Meiryo" pitchFamily="34" charset="-122"/>
-                <a:cs typeface="Meiryo" pitchFamily="34" charset="-120"/>
+                <a:latin typeface="Yu Gothic Medium" pitchFamily="34" charset="0"/>
+                <a:ea typeface="Yu Gothic Medium" pitchFamily="34" charset="-122"/>
+                <a:cs typeface="Yu Gothic Medium" pitchFamily="34" charset="-120"/>
               </a:rPr>
               <a:t>外部に報告するための会計</a:t>
             </a:r>
-            <a:endParaRPr lang="en-US" sz="1300" dirty="0"/>
+            <a:endParaRPr lang="en-US" sz="1350" dirty="0"/>
           </a:p>
         </p:txBody>
       </p:sp>
@@ -3048,8 +3051,8 @@
         </p:nvSpPr>
         <p:spPr>
           <a:xfrm>
-            <a:off x="1051560" y="3611880"/>
-            <a:ext cx="4404208" cy="1965960"/>
+            <a:off x="1143000" y="3703320"/>
+            <a:ext cx="4267048" cy="1874520"/>
           </a:xfrm>
           <a:prstGeom prst="rect">
             <a:avLst/>
@@ -3062,8 +3065,11 @@
           <a:lstStyle/>
           <a:p>
             <a:pPr algn="l" marL="177800" indent="-177800">
+              <a:lnSpc>
+                <a:spcPct val="140000"/>
+              </a:lnSpc>
               <a:spcAft>
-                <a:spcPts val="1000"/>
+                <a:spcPts val="1100"/>
               </a:spcAft>
               <a:buSzPct val="100000"/>
               <a:buChar char="•"/>
@@ -3073,9 +3079,9 @@
                 <a:solidFill>
                   <a:srgbClr val="1B2735"/>
                 </a:solidFill>
-                <a:latin typeface="Meiryo" pitchFamily="34" charset="0"/>
-                <a:ea typeface="Meiryo" pitchFamily="34" charset="-122"/>
-                <a:cs typeface="Meiryo" pitchFamily="34" charset="-120"/>
+                <a:latin typeface="Yu Gothic Medium" pitchFamily="34" charset="0"/>
+                <a:ea typeface="Yu Gothic Medium" pitchFamily="34" charset="-122"/>
+                <a:cs typeface="Yu Gothic Medium" pitchFamily="34" charset="-120"/>
               </a:rPr>
               <a:t>対象は税務署・銀行・株主</a:t>
             </a:r>
@@ -3083,8 +3089,11 @@
           </a:p>
           <a:p>
             <a:pPr algn="l" marL="177800" indent="-177800">
+              <a:lnSpc>
+                <a:spcPct val="140000"/>
+              </a:lnSpc>
               <a:spcAft>
-                <a:spcPts val="1000"/>
+                <a:spcPts val="1100"/>
               </a:spcAft>
               <a:buSzPct val="100000"/>
               <a:buChar char="•"/>
@@ -3094,9 +3103,9 @@
                 <a:solidFill>
                   <a:srgbClr val="1B2735"/>
                 </a:solidFill>
-                <a:latin typeface="Meiryo" pitchFamily="34" charset="0"/>
-                <a:ea typeface="Meiryo" pitchFamily="34" charset="-122"/>
-                <a:cs typeface="Meiryo" pitchFamily="34" charset="-120"/>
+                <a:latin typeface="Yu Gothic Medium" pitchFamily="34" charset="0"/>
+                <a:ea typeface="Yu Gothic Medium" pitchFamily="34" charset="-122"/>
+                <a:cs typeface="Yu Gothic Medium" pitchFamily="34" charset="-120"/>
               </a:rPr>
               <a:t>過去の確定した数字</a:t>
             </a:r>
@@ -3104,8 +3113,11 @@
           </a:p>
           <a:p>
             <a:pPr algn="l" marL="177800" indent="-177800">
+              <a:lnSpc>
+                <a:spcPct val="140000"/>
+              </a:lnSpc>
               <a:spcAft>
-                <a:spcPts val="1000"/>
+                <a:spcPts val="1100"/>
               </a:spcAft>
               <a:buSzPct val="100000"/>
               <a:buChar char="•"/>
@@ -3115,9 +3127,9 @@
                 <a:solidFill>
                   <a:srgbClr val="1B2735"/>
                 </a:solidFill>
-                <a:latin typeface="Meiryo" pitchFamily="34" charset="0"/>
-                <a:ea typeface="Meiryo" pitchFamily="34" charset="-122"/>
-                <a:cs typeface="Meiryo" pitchFamily="34" charset="-120"/>
+                <a:latin typeface="Yu Gothic Medium" pitchFamily="34" charset="0"/>
+                <a:ea typeface="Yu Gothic Medium" pitchFamily="34" charset="-122"/>
+                <a:cs typeface="Yu Gothic Medium" pitchFamily="34" charset="-120"/>
               </a:rPr>
               <a:t>会計基準（ルール）に従う</a:t>
             </a:r>
@@ -3125,8 +3137,11 @@
           </a:p>
           <a:p>
             <a:pPr algn="l" marL="177800" indent="-177800">
+              <a:lnSpc>
+                <a:spcPct val="140000"/>
+              </a:lnSpc>
               <a:spcAft>
-                <a:spcPts val="1000"/>
+                <a:spcPts val="1100"/>
               </a:spcAft>
               <a:buSzPct val="100000"/>
               <a:buChar char="•"/>
@@ -3136,9 +3151,9 @@
                 <a:solidFill>
                   <a:srgbClr val="1B2735"/>
                 </a:solidFill>
-                <a:latin typeface="Meiryo" pitchFamily="34" charset="0"/>
-                <a:ea typeface="Meiryo" pitchFamily="34" charset="-122"/>
-                <a:cs typeface="Meiryo" pitchFamily="34" charset="-120"/>
+                <a:latin typeface="Yu Gothic Medium" pitchFamily="34" charset="0"/>
+                <a:ea typeface="Yu Gothic Medium" pitchFamily="34" charset="-122"/>
+                <a:cs typeface="Yu Gothic Medium" pitchFamily="34" charset="-120"/>
               </a:rPr>
               <a:t>年次・決算が中心</a:t>
             </a:r>
@@ -3154,8 +3169,8 @@
         </p:nvSpPr>
         <p:spPr>
           <a:xfrm>
-            <a:off x="6735928" y="2606040"/>
-            <a:ext cx="4404208" cy="457200"/>
+            <a:off x="6781648" y="2670048"/>
+            <a:ext cx="4267048" cy="457200"/>
           </a:xfrm>
           <a:prstGeom prst="rect">
             <a:avLst/>
@@ -3171,17 +3186,17 @@
               <a:buNone/>
             </a:pPr>
             <a:r>
-              <a:rPr lang="en-US" sz="2200" b="1" dirty="0">
+              <a:rPr lang="en-US" sz="2300" b="1" dirty="0">
                 <a:solidFill>
                   <a:srgbClr val="0A5E66"/>
                 </a:solidFill>
-                <a:latin typeface="Meiryo" pitchFamily="34" charset="0"/>
-                <a:ea typeface="Meiryo" pitchFamily="34" charset="-122"/>
-                <a:cs typeface="Meiryo" pitchFamily="34" charset="-120"/>
+                <a:latin typeface="Yu Gothic" pitchFamily="34" charset="0"/>
+                <a:ea typeface="Yu Gothic" pitchFamily="34" charset="-122"/>
+                <a:cs typeface="Yu Gothic" pitchFamily="34" charset="-120"/>
               </a:rPr>
               <a:t>管理会計</a:t>
             </a:r>
-            <a:endParaRPr lang="en-US" sz="2200" dirty="0"/>
+            <a:endParaRPr lang="en-US" sz="2300" dirty="0"/>
           </a:p>
         </p:txBody>
       </p:sp>
@@ -3193,8 +3208,8 @@
         </p:nvSpPr>
         <p:spPr>
           <a:xfrm>
-            <a:off x="6735928" y="3108960"/>
-            <a:ext cx="4404208" cy="320040"/>
+            <a:off x="6781648" y="3182112"/>
+            <a:ext cx="4267048" cy="320040"/>
           </a:xfrm>
           <a:prstGeom prst="rect">
             <a:avLst/>
@@ -3210,17 +3225,17 @@
               <a:buNone/>
             </a:pPr>
             <a:r>
-              <a:rPr lang="en-US" sz="1300" dirty="0">
+              <a:rPr lang="en-US" sz="1350" dirty="0">
                 <a:solidFill>
                   <a:srgbClr val="566373"/>
                 </a:solidFill>
-                <a:latin typeface="Meiryo" pitchFamily="34" charset="0"/>
-                <a:ea typeface="Meiryo" pitchFamily="34" charset="-122"/>
-                <a:cs typeface="Meiryo" pitchFamily="34" charset="-120"/>
+                <a:latin typeface="Yu Gothic Medium" pitchFamily="34" charset="0"/>
+                <a:ea typeface="Yu Gothic Medium" pitchFamily="34" charset="-122"/>
+                <a:cs typeface="Yu Gothic Medium" pitchFamily="34" charset="-120"/>
               </a:rPr>
               <a:t>経営判断のための会計</a:t>
             </a:r>
-            <a:endParaRPr lang="en-US" sz="1300" dirty="0"/>
+            <a:endParaRPr lang="en-US" sz="1350" dirty="0"/>
           </a:p>
         </p:txBody>
       </p:sp>
@@ -3232,8 +3247,8 @@
         </p:nvSpPr>
         <p:spPr>
           <a:xfrm>
-            <a:off x="6735928" y="3611880"/>
-            <a:ext cx="4404208" cy="1965960"/>
+            <a:off x="6781648" y="3703320"/>
+            <a:ext cx="4267048" cy="1874520"/>
           </a:xfrm>
           <a:prstGeom prst="rect">
             <a:avLst/>
@@ -3246,8 +3261,11 @@
           <a:lstStyle/>
           <a:p>
             <a:pPr algn="l" marL="177800" indent="-177800">
+              <a:lnSpc>
+                <a:spcPct val="140000"/>
+              </a:lnSpc>
               <a:spcAft>
-                <a:spcPts val="1000"/>
+                <a:spcPts val="1100"/>
               </a:spcAft>
               <a:buSzPct val="100000"/>
               <a:buChar char="•"/>
@@ -3257,9 +3275,9 @@
                 <a:solidFill>
                   <a:srgbClr val="1B2735"/>
                 </a:solidFill>
-                <a:latin typeface="Meiryo" pitchFamily="34" charset="0"/>
-                <a:ea typeface="Meiryo" pitchFamily="34" charset="-122"/>
-                <a:cs typeface="Meiryo" pitchFamily="34" charset="-120"/>
+                <a:latin typeface="Yu Gothic Medium" pitchFamily="34" charset="0"/>
+                <a:ea typeface="Yu Gothic Medium" pitchFamily="34" charset="-122"/>
+                <a:cs typeface="Yu Gothic Medium" pitchFamily="34" charset="-120"/>
               </a:rPr>
               <a:t>対象は社内（経営者・現場）</a:t>
             </a:r>
@@ -3267,8 +3285,11 @@
           </a:p>
           <a:p>
             <a:pPr algn="l" marL="177800" indent="-177800">
+              <a:lnSpc>
+                <a:spcPct val="140000"/>
+              </a:lnSpc>
               <a:spcAft>
-                <a:spcPts val="1000"/>
+                <a:spcPts val="1100"/>
               </a:spcAft>
               <a:buSzPct val="100000"/>
               <a:buChar char="•"/>
@@ -3278,9 +3299,9 @@
                 <a:solidFill>
                   <a:srgbClr val="1B2735"/>
                 </a:solidFill>
-                <a:latin typeface="Meiryo" pitchFamily="34" charset="0"/>
-                <a:ea typeface="Meiryo" pitchFamily="34" charset="-122"/>
-                <a:cs typeface="Meiryo" pitchFamily="34" charset="-120"/>
+                <a:latin typeface="Yu Gothic Medium" pitchFamily="34" charset="0"/>
+                <a:ea typeface="Yu Gothic Medium" pitchFamily="34" charset="-122"/>
+                <a:cs typeface="Yu Gothic Medium" pitchFamily="34" charset="-120"/>
               </a:rPr>
               <a:t>未来を見据えた数字</a:t>
             </a:r>
@@ -3288,8 +3309,11 @@
           </a:p>
           <a:p>
             <a:pPr algn="l" marL="177800" indent="-177800">
+              <a:lnSpc>
+                <a:spcPct val="140000"/>
+              </a:lnSpc>
               <a:spcAft>
-                <a:spcPts val="1000"/>
+                <a:spcPts val="1100"/>
               </a:spcAft>
               <a:buSzPct val="100000"/>
               <a:buChar char="•"/>
@@ -3299,9 +3323,9 @@
                 <a:solidFill>
                   <a:srgbClr val="1B2735"/>
                 </a:solidFill>
-                <a:latin typeface="Meiryo" pitchFamily="34" charset="0"/>
-                <a:ea typeface="Meiryo" pitchFamily="34" charset="-122"/>
-                <a:cs typeface="Meiryo" pitchFamily="34" charset="-120"/>
+                <a:latin typeface="Yu Gothic Medium" pitchFamily="34" charset="0"/>
+                <a:ea typeface="Yu Gothic Medium" pitchFamily="34" charset="-122"/>
+                <a:cs typeface="Yu Gothic Medium" pitchFamily="34" charset="-120"/>
               </a:rPr>
               <a:t>自社が見たい形に設計できる</a:t>
             </a:r>
@@ -3309,8 +3333,11 @@
           </a:p>
           <a:p>
             <a:pPr algn="l" marL="177800" indent="-177800">
+              <a:lnSpc>
+                <a:spcPct val="140000"/>
+              </a:lnSpc>
               <a:spcAft>
-                <a:spcPts val="1000"/>
+                <a:spcPts val="1100"/>
               </a:spcAft>
               <a:buSzPct val="100000"/>
               <a:buChar char="•"/>
@@ -3320,9 +3347,9 @@
                 <a:solidFill>
                   <a:srgbClr val="1B2735"/>
                 </a:solidFill>
-                <a:latin typeface="Meiryo" pitchFamily="34" charset="0"/>
-                <a:ea typeface="Meiryo" pitchFamily="34" charset="-122"/>
-                <a:cs typeface="Meiryo" pitchFamily="34" charset="-120"/>
+                <a:latin typeface="Yu Gothic Medium" pitchFamily="34" charset="0"/>
+                <a:ea typeface="Yu Gothic Medium" pitchFamily="34" charset="-122"/>
+                <a:cs typeface="Yu Gothic Medium" pitchFamily="34" charset="-120"/>
               </a:rPr>
               <a:t>月次・タイムリーが命</a:t>
             </a:r>
@@ -3338,7 +3365,7 @@
         </p:nvSpPr>
         <p:spPr>
           <a:xfrm>
-            <a:off x="640080" y="6473952"/>
+            <a:off x="685800" y="6473952"/>
             <a:ext cx="2743200" cy="274320"/>
           </a:xfrm>
           <a:prstGeom prst="rect">
@@ -3355,17 +3382,17 @@
               <a:buNone/>
             </a:pPr>
             <a:r>
-              <a:rPr lang="en-US" sz="1100" dirty="0">
+              <a:rPr lang="en-US" sz="1200" dirty="0">
                 <a:solidFill>
                   <a:srgbClr val="8A98A6"/>
                 </a:solidFill>
-                <a:latin typeface="Meiryo" pitchFamily="34" charset="0"/>
-                <a:ea typeface="Meiryo" pitchFamily="34" charset="-122"/>
-                <a:cs typeface="Meiryo" pitchFamily="34" charset="-120"/>
+                <a:latin typeface="Yu Gothic" pitchFamily="34" charset="0"/>
+                <a:ea typeface="Yu Gothic" pitchFamily="34" charset="-122"/>
+                <a:cs typeface="Yu Gothic" pitchFamily="34" charset="-120"/>
               </a:rPr>
               <a:t>大吉会計</a:t>
             </a:r>
-            <a:endParaRPr lang="en-US" sz="1100" dirty="0"/>
+            <a:endParaRPr lang="en-US" sz="1200" dirty="0"/>
           </a:p>
         </p:txBody>
       </p:sp>
@@ -3377,7 +3404,7 @@
         </p:nvSpPr>
         <p:spPr>
           <a:xfrm>
-            <a:off x="10637215" y="6473952"/>
+            <a:off x="10591495" y="6473952"/>
             <a:ext cx="914400" cy="274320"/>
           </a:xfrm>
           <a:prstGeom prst="rect">
@@ -3394,17 +3421,17 @@
               <a:buNone/>
             </a:pPr>
             <a:r>
-              <a:rPr lang="en-US" sz="1100" dirty="0">
+              <a:rPr lang="en-US" sz="1200" dirty="0">
                 <a:solidFill>
                   <a:srgbClr val="8A98A6"/>
                 </a:solidFill>
-                <a:latin typeface="Meiryo" pitchFamily="34" charset="0"/>
-                <a:ea typeface="Meiryo" pitchFamily="34" charset="-122"/>
-                <a:cs typeface="Meiryo" pitchFamily="34" charset="-120"/>
+                <a:latin typeface="Yu Gothic" pitchFamily="34" charset="0"/>
+                <a:ea typeface="Yu Gothic" pitchFamily="34" charset="-122"/>
+                <a:cs typeface="Yu Gothic" pitchFamily="34" charset="-120"/>
               </a:rPr>
               <a:t>4</a:t>
             </a:r>
-            <a:endParaRPr lang="en-US" sz="1100" dirty="0"/>
+            <a:endParaRPr lang="en-US" sz="1200" dirty="0"/>
           </a:p>
         </p:txBody>
       </p:sp>
@@ -3448,7 +3475,7 @@
         </p:nvSpPr>
         <p:spPr>
           <a:xfrm>
-            <a:off x="640080" y="690372"/>
+            <a:off x="685800" y="736092"/>
             <a:ext cx="118872" cy="118872"/>
           </a:xfrm>
           <a:prstGeom prst="ellipse">
@@ -3468,7 +3495,7 @@
         </p:nvSpPr>
         <p:spPr>
           <a:xfrm>
-            <a:off x="877824" y="640080"/>
+            <a:off x="923544" y="685800"/>
             <a:ext cx="7315200" cy="274320"/>
           </a:xfrm>
           <a:prstGeom prst="rect">
@@ -3485,17 +3512,17 @@
               <a:buNone/>
             </a:pPr>
             <a:r>
-              <a:rPr lang="en-US" sz="1250" b="1" spc="100" kern="0" dirty="0">
+              <a:rPr lang="en-US" sz="1200" b="1" spc="150" kern="0" dirty="0">
                 <a:solidFill>
                   <a:srgbClr val="0E7C86"/>
                 </a:solidFill>
-                <a:latin typeface="Meiryo" pitchFamily="34" charset="0"/>
-                <a:ea typeface="Meiryo" pitchFamily="34" charset="-122"/>
-                <a:cs typeface="Meiryo" pitchFamily="34" charset="-120"/>
+                <a:latin typeface="Yu Gothic" pitchFamily="34" charset="0"/>
+                <a:ea typeface="Yu Gothic" pitchFamily="34" charset="-122"/>
+                <a:cs typeface="Yu Gothic" pitchFamily="34" charset="-120"/>
               </a:rPr>
               <a:t>月次で見る効果</a:t>
             </a:r>
-            <a:endParaRPr lang="en-US" sz="1250" dirty="0"/>
+            <a:endParaRPr lang="en-US" sz="1200" dirty="0"/>
           </a:p>
         </p:txBody>
       </p:sp>
@@ -3507,8 +3534,8 @@
         </p:nvSpPr>
         <p:spPr>
           <a:xfrm>
-            <a:off x="640080" y="1051560"/>
-            <a:ext cx="7772400" cy="868680"/>
+            <a:off x="685800" y="1051560"/>
+            <a:ext cx="7772400" cy="841248"/>
           </a:xfrm>
           <a:prstGeom prst="rect">
             <a:avLst/>
@@ -3522,22 +3549,22 @@
           <a:p>
             <a:pPr algn="l" indent="0" marL="0">
               <a:lnSpc>
-                <a:spcPct val="112000"/>
+                <a:spcPct val="108000"/>
               </a:lnSpc>
               <a:buNone/>
             </a:pPr>
             <a:r>
-              <a:rPr lang="en-US" sz="2800" b="1" dirty="0">
+              <a:rPr lang="en-US" sz="3000" b="1" spc="-20" kern="0" dirty="0">
                 <a:solidFill>
                   <a:srgbClr val="1B2735"/>
                 </a:solidFill>
-                <a:latin typeface="Meiryo" pitchFamily="34" charset="0"/>
-                <a:ea typeface="Meiryo" pitchFamily="34" charset="-122"/>
-                <a:cs typeface="Meiryo" pitchFamily="34" charset="-120"/>
+                <a:latin typeface="Yu Gothic" pitchFamily="34" charset="0"/>
+                <a:ea typeface="Yu Gothic" pitchFamily="34" charset="-122"/>
+                <a:cs typeface="Yu Gothic" pitchFamily="34" charset="-120"/>
               </a:rPr>
               <a:t>月次で見ると、打ち手が早くなる</a:t>
             </a:r>
-            <a:endParaRPr lang="en-US" sz="2800" dirty="0"/>
+            <a:endParaRPr lang="en-US" sz="3000" dirty="0"/>
           </a:p>
         </p:txBody>
       </p:sp>
@@ -3548,8 +3575,8 @@
           <p:nvPr/>
         </p:nvGraphicFramePr>
         <p:xfrm>
-          <a:off x="640080" y="1965960"/>
-          <a:ext cx="6858000" cy="4023360"/>
+          <a:off x="685800" y="2011680"/>
+          <a:ext cx="6766560" cy="4023360"/>
         </p:xfrm>
         <a:graphic xmlns:a="http://schemas.openxmlformats.org/drawingml/2006/main">
           <a:graphicData uri="http://schemas.openxmlformats.org/drawingml/2006/chart">
@@ -3565,12 +3592,12 @@
         </p:nvSpPr>
         <p:spPr>
           <a:xfrm>
-            <a:off x="7818120" y="2148840"/>
-            <a:ext cx="3733495" cy="3566160"/>
+            <a:off x="7818120" y="2194560"/>
+            <a:ext cx="3687775" cy="3520440"/>
           </a:xfrm>
           <a:prstGeom prst="roundRect">
             <a:avLst>
-              <a:gd name="adj" fmla="val 2308"/>
+              <a:gd name="adj" fmla="val 2597"/>
             </a:avLst>
           </a:prstGeom>
           <a:solidFill>
@@ -3580,7 +3607,7 @@
           <a:effectLst>
             <a:outerShdw sx="100000" sy="100000" kx="0" ky="0" algn="bl" rotWithShape="0" blurRad="127000" dist="50800" dir="5400000">
               <a:srgbClr val="1B2735">
-                <a:alpha val="12000"/>
+                <a:alpha val="10000"/>
               </a:srgbClr>
             </a:outerShdw>
           </a:effectLst>
@@ -3594,8 +3621,8 @@
         </p:nvSpPr>
         <p:spPr>
           <a:xfrm>
-            <a:off x="8183880" y="2514600"/>
-            <a:ext cx="3001975" cy="731520"/>
+            <a:off x="8202168" y="2560320"/>
+            <a:ext cx="2919679" cy="731520"/>
           </a:xfrm>
           <a:prstGeom prst="rect">
             <a:avLst/>
@@ -3609,7 +3636,7 @@
           <a:p>
             <a:pPr algn="l" indent="0" marL="0">
               <a:lnSpc>
-                <a:spcPct val="115000"/>
+                <a:spcPct val="108000"/>
               </a:lnSpc>
               <a:buNone/>
             </a:pPr>
@@ -3618,9 +3645,9 @@
                 <a:solidFill>
                   <a:srgbClr val="0A5E66"/>
                 </a:solidFill>
-                <a:latin typeface="Meiryo" pitchFamily="34" charset="0"/>
-                <a:ea typeface="Meiryo" pitchFamily="34" charset="-122"/>
-                <a:cs typeface="Meiryo" pitchFamily="34" charset="-120"/>
+                <a:latin typeface="Yu Gothic" pitchFamily="34" charset="0"/>
+                <a:ea typeface="Yu Gothic" pitchFamily="34" charset="-122"/>
+                <a:cs typeface="Yu Gothic" pitchFamily="34" charset="-120"/>
               </a:rPr>
               <a:t>早期把握 → 早期対応</a:t>
             </a:r>
@@ -3636,8 +3663,8 @@
         </p:nvSpPr>
         <p:spPr>
           <a:xfrm>
-            <a:off x="8183880" y="3429000"/>
-            <a:ext cx="3001975" cy="2103120"/>
+            <a:off x="8202168" y="3456432"/>
+            <a:ext cx="2919679" cy="2103120"/>
           </a:xfrm>
           <a:prstGeom prst="rect">
             <a:avLst/>
@@ -3651,7 +3678,7 @@
           <a:p>
             <a:pPr algn="l" indent="0" marL="0">
               <a:lnSpc>
-                <a:spcPct val="145000"/>
+                <a:spcPct val="160000"/>
               </a:lnSpc>
               <a:buNone/>
             </a:pPr>
@@ -3660,9 +3687,9 @@
                 <a:solidFill>
                   <a:srgbClr val="1B2735"/>
                 </a:solidFill>
-                <a:latin typeface="Meiryo" pitchFamily="34" charset="0"/>
-                <a:ea typeface="Meiryo" pitchFamily="34" charset="-122"/>
-                <a:cs typeface="Meiryo" pitchFamily="34" charset="-120"/>
+                <a:latin typeface="Yu Gothic Medium" pitchFamily="34" charset="0"/>
+                <a:ea typeface="Yu Gothic Medium" pitchFamily="34" charset="-122"/>
+                <a:cs typeface="Yu Gothic Medium" pitchFamily="34" charset="-120"/>
               </a:rPr>
               <a:t>6月の落ち込みをその月のうちに察知できれば、7〜8月の打ち手でV字回復につなげられます。決算を待つ必要はありません。</a:t>
             </a:r>
@@ -3678,7 +3705,7 @@
         </p:nvSpPr>
         <p:spPr>
           <a:xfrm>
-            <a:off x="640080" y="6473952"/>
+            <a:off x="685800" y="6473952"/>
             <a:ext cx="2743200" cy="274320"/>
           </a:xfrm>
           <a:prstGeom prst="rect">
@@ -3695,17 +3722,17 @@
               <a:buNone/>
             </a:pPr>
             <a:r>
-              <a:rPr lang="en-US" sz="1100" dirty="0">
+              <a:rPr lang="en-US" sz="1200" dirty="0">
                 <a:solidFill>
                   <a:srgbClr val="8A98A6"/>
                 </a:solidFill>
-                <a:latin typeface="Meiryo" pitchFamily="34" charset="0"/>
-                <a:ea typeface="Meiryo" pitchFamily="34" charset="-122"/>
-                <a:cs typeface="Meiryo" pitchFamily="34" charset="-120"/>
+                <a:latin typeface="Yu Gothic" pitchFamily="34" charset="0"/>
+                <a:ea typeface="Yu Gothic" pitchFamily="34" charset="-122"/>
+                <a:cs typeface="Yu Gothic" pitchFamily="34" charset="-120"/>
               </a:rPr>
               <a:t>大吉会計</a:t>
             </a:r>
-            <a:endParaRPr lang="en-US" sz="1100" dirty="0"/>
+            <a:endParaRPr lang="en-US" sz="1200" dirty="0"/>
           </a:p>
         </p:txBody>
       </p:sp>
@@ -3717,7 +3744,7 @@
         </p:nvSpPr>
         <p:spPr>
           <a:xfrm>
-            <a:off x="10637215" y="6473952"/>
+            <a:off x="10591495" y="6473952"/>
             <a:ext cx="914400" cy="274320"/>
           </a:xfrm>
           <a:prstGeom prst="rect">
@@ -3734,17 +3761,17 @@
               <a:buNone/>
             </a:pPr>
             <a:r>
-              <a:rPr lang="en-US" sz="1100" dirty="0">
+              <a:rPr lang="en-US" sz="1200" dirty="0">
                 <a:solidFill>
                   <a:srgbClr val="8A98A6"/>
                 </a:solidFill>
-                <a:latin typeface="Meiryo" pitchFamily="34" charset="0"/>
-                <a:ea typeface="Meiryo" pitchFamily="34" charset="-122"/>
-                <a:cs typeface="Meiryo" pitchFamily="34" charset="-120"/>
+                <a:latin typeface="Yu Gothic" pitchFamily="34" charset="0"/>
+                <a:ea typeface="Yu Gothic" pitchFamily="34" charset="-122"/>
+                <a:cs typeface="Yu Gothic" pitchFamily="34" charset="-120"/>
               </a:rPr>
               <a:t>5</a:t>
             </a:r>
-            <a:endParaRPr lang="en-US" sz="1100" dirty="0"/>
+            <a:endParaRPr lang="en-US" sz="1200" dirty="0"/>
           </a:p>
         </p:txBody>
       </p:sp>
@@ -3808,7 +3835,7 @@
         </p:nvSpPr>
         <p:spPr>
           <a:xfrm>
-            <a:off x="640080" y="1421892"/>
+            <a:off x="685800" y="1421892"/>
             <a:ext cx="118872" cy="118872"/>
           </a:xfrm>
           <a:prstGeom prst="ellipse">
@@ -3828,7 +3855,7 @@
         </p:nvSpPr>
         <p:spPr>
           <a:xfrm>
-            <a:off x="877824" y="1371600"/>
+            <a:off x="923544" y="1371600"/>
             <a:ext cx="7315200" cy="274320"/>
           </a:xfrm>
           <a:prstGeom prst="rect">
@@ -3845,17 +3872,17 @@
               <a:buNone/>
             </a:pPr>
             <a:r>
-              <a:rPr lang="en-US" sz="1250" b="1" spc="100" kern="0" dirty="0">
+              <a:rPr lang="en-US" sz="1200" b="1" spc="150" kern="0" dirty="0">
                 <a:solidFill>
                   <a:srgbClr val="5FA8AE"/>
                 </a:solidFill>
-                <a:latin typeface="Meiryo" pitchFamily="34" charset="0"/>
-                <a:ea typeface="Meiryo" pitchFamily="34" charset="-122"/>
-                <a:cs typeface="Meiryo" pitchFamily="34" charset="-120"/>
+                <a:latin typeface="Yu Gothic" pitchFamily="34" charset="0"/>
+                <a:ea typeface="Yu Gothic" pitchFamily="34" charset="-122"/>
+                <a:cs typeface="Yu Gothic" pitchFamily="34" charset="-120"/>
               </a:rPr>
               <a:t>次の一歩</a:t>
             </a:r>
-            <a:endParaRPr lang="en-US" sz="1250" dirty="0"/>
+            <a:endParaRPr lang="en-US" sz="1200" dirty="0"/>
           </a:p>
         </p:txBody>
       </p:sp>
@@ -3867,8 +3894,8 @@
         </p:nvSpPr>
         <p:spPr>
           <a:xfrm>
-            <a:off x="640080" y="1965960"/>
-            <a:ext cx="10058400" cy="1371600"/>
+            <a:off x="685800" y="1965960"/>
+            <a:ext cx="10058400" cy="1408176"/>
           </a:xfrm>
           <a:prstGeom prst="rect">
             <a:avLst/>
@@ -3882,18 +3909,18 @@
           <a:p>
             <a:pPr algn="l" indent="0" marL="0">
               <a:lnSpc>
-                <a:spcPct val="112000"/>
+                <a:spcPct val="108000"/>
               </a:lnSpc>
               <a:buNone/>
             </a:pPr>
             <a:r>
-              <a:rPr lang="en-US" sz="3200" b="1" dirty="0">
+              <a:rPr lang="en-US" sz="3200" b="1" spc="-20" kern="0" dirty="0">
                 <a:solidFill>
                   <a:srgbClr val="FFFFFF"/>
                 </a:solidFill>
-                <a:latin typeface="Meiryo" pitchFamily="34" charset="0"/>
-                <a:ea typeface="Meiryo" pitchFamily="34" charset="-122"/>
-                <a:cs typeface="Meiryo" pitchFamily="34" charset="-120"/>
+                <a:latin typeface="Yu Gothic" pitchFamily="34" charset="0"/>
+                <a:ea typeface="Yu Gothic" pitchFamily="34" charset="-122"/>
+                <a:cs typeface="Yu Gothic" pitchFamily="34" charset="-120"/>
               </a:rPr>
               <a:t>あなたの会社の数字を、</a:t>
             </a:r>
@@ -3902,18 +3929,18 @@
           <a:p>
             <a:pPr algn="l" indent="0" marL="0">
               <a:lnSpc>
-                <a:spcPct val="112000"/>
+                <a:spcPct val="108000"/>
               </a:lnSpc>
               <a:buNone/>
             </a:pPr>
             <a:r>
-              <a:rPr lang="en-US" sz="3200" b="1" dirty="0">
+              <a:rPr lang="en-US" sz="3200" b="1" spc="-20" kern="0" dirty="0">
                 <a:solidFill>
                   <a:srgbClr val="FFFFFF"/>
                 </a:solidFill>
-                <a:latin typeface="Meiryo" pitchFamily="34" charset="0"/>
-                <a:ea typeface="Meiryo" pitchFamily="34" charset="-122"/>
-                <a:cs typeface="Meiryo" pitchFamily="34" charset="-120"/>
+                <a:latin typeface="Yu Gothic" pitchFamily="34" charset="0"/>
+                <a:ea typeface="Yu Gothic" pitchFamily="34" charset="-122"/>
+                <a:cs typeface="Yu Gothic" pitchFamily="34" charset="-120"/>
               </a:rPr>
               <a:t>一緒に見てみませんか？</a:t>
             </a:r>
@@ -3929,7 +3956,7 @@
         </p:nvSpPr>
         <p:spPr>
           <a:xfrm>
-            <a:off x="640080" y="3886200"/>
+            <a:off x="685800" y="3886200"/>
             <a:ext cx="7955280" cy="1691640"/>
           </a:xfrm>
           <a:prstGeom prst="roundRect">
@@ -3944,7 +3971,7 @@
           <a:effectLst>
             <a:outerShdw sx="100000" sy="100000" kx="0" ky="0" algn="bl" rotWithShape="0" blurRad="127000" dist="50800" dir="5400000">
               <a:srgbClr val="1B2735">
-                <a:alpha val="12000"/>
+                <a:alpha val="10000"/>
               </a:srgbClr>
             </a:outerShdw>
           </a:effectLst>
@@ -3958,7 +3985,7 @@
         </p:nvSpPr>
         <p:spPr>
           <a:xfrm>
-            <a:off x="1097280" y="4178808"/>
+            <a:off x="1143000" y="4197096"/>
             <a:ext cx="7040880" cy="457200"/>
           </a:xfrm>
           <a:prstGeom prst="rect">
@@ -3979,9 +4006,9 @@
                 <a:solidFill>
                   <a:srgbClr val="FFFFFF"/>
                 </a:solidFill>
-                <a:latin typeface="Meiryo" pitchFamily="34" charset="0"/>
-                <a:ea typeface="Meiryo" pitchFamily="34" charset="-122"/>
-                <a:cs typeface="Meiryo" pitchFamily="34" charset="-120"/>
+                <a:latin typeface="Yu Gothic" pitchFamily="34" charset="0"/>
+                <a:ea typeface="Yu Gothic" pitchFamily="34" charset="-122"/>
+                <a:cs typeface="Yu Gothic" pitchFamily="34" charset="-120"/>
               </a:rPr>
               <a:t>個別相談（無料・30分）</a:t>
             </a:r>
@@ -3997,7 +4024,7 @@
         </p:nvSpPr>
         <p:spPr>
           <a:xfrm>
-            <a:off x="1097280" y="4727448"/>
+            <a:off x="1143000" y="4754880"/>
             <a:ext cx="7040880" cy="685800"/>
           </a:xfrm>
           <a:prstGeom prst="rect">
@@ -4012,22 +4039,22 @@
           <a:p>
             <a:pPr algn="l" indent="0" marL="0">
               <a:lnSpc>
-                <a:spcPct val="135000"/>
+                <a:spcPct val="140000"/>
               </a:lnSpc>
               <a:buNone/>
             </a:pPr>
             <a:r>
-              <a:rPr lang="en-US" sz="1300" dirty="0">
+              <a:rPr lang="en-US" sz="1350" dirty="0">
                 <a:solidFill>
                   <a:srgbClr val="EAF7F7"/>
                 </a:solidFill>
-                <a:latin typeface="Meiryo" pitchFamily="34" charset="0"/>
-                <a:ea typeface="Meiryo" pitchFamily="34" charset="-122"/>
-                <a:cs typeface="Meiryo" pitchFamily="34" charset="-120"/>
+                <a:latin typeface="Yu Gothic Medium" pitchFamily="34" charset="0"/>
+                <a:ea typeface="Yu Gothic Medium" pitchFamily="34" charset="-122"/>
+                <a:cs typeface="Yu Gothic Medium" pitchFamily="34" charset="-120"/>
               </a:rPr>
               <a:t>自社の月次資料をお持ちいただければ、その場で改善のヒントをお伝えします。無理な勧誘はいたしません。</a:t>
             </a:r>
-            <a:endParaRPr lang="en-US" sz="1300" dirty="0"/>
+            <a:endParaRPr lang="en-US" sz="1350" dirty="0"/>
           </a:p>
         </p:txBody>
       </p:sp>
@@ -4039,7 +4066,7 @@
         </p:nvSpPr>
         <p:spPr>
           <a:xfrm>
-            <a:off x="640080" y="6144768"/>
+            <a:off x="685800" y="6144768"/>
             <a:ext cx="10515600" cy="320040"/>
           </a:xfrm>
           <a:prstGeom prst="rect">
@@ -4060,9 +4087,9 @@
                 <a:solidFill>
                   <a:srgbClr val="AAB8C7"/>
                 </a:solidFill>
-                <a:latin typeface="Meiryo" pitchFamily="34" charset="0"/>
-                <a:ea typeface="Meiryo" pitchFamily="34" charset="-122"/>
-                <a:cs typeface="Meiryo" pitchFamily="34" charset="-120"/>
+                <a:latin typeface="Yu Gothic" pitchFamily="34" charset="0"/>
+                <a:ea typeface="Yu Gothic" pitchFamily="34" charset="-122"/>
+                <a:cs typeface="Yu Gothic" pitchFamily="34" charset="-120"/>
               </a:rPr>
               <a:t>お申し込み：受付フォームより ／ お問い合わせ：info@example.co.jp</a:t>
             </a:r>
